--- a/pptx-asset-library/decks/01_tables/TBL_bulk_signal_v1.pptx
+++ b/pptx-asset-library/decks/01_tables/TBL_bulk_signal_v1.pptx
@@ -3189,7 +3189,7 @@
           <a:graphicData uri="http://schemas.openxmlformats.org/drawingml/2006/table">
             <a:tbl>
               <a:tblPr>
-                <a:tableStyleId>{2D5ABB26-0587-4C30-8999-92F81FD0307C}</a:tableStyleId>
+                <a:tableStyleId>{5C22544A-7EE6-4342-B048-85BDC9FD1C3A}</a:tableStyleId>
               </a:tblPr>
               <a:tblGrid>
                 <a:gridCol w="3291840"/>
@@ -4256,7 +4256,7 @@
           <a:graphicData uri="http://schemas.openxmlformats.org/drawingml/2006/table">
             <a:tbl>
               <a:tblPr>
-                <a:tableStyleId>{2D5ABB26-0587-4C30-8999-92F81FD0307C}</a:tableStyleId>
+                <a:tableStyleId>{5C22544A-7EE6-4342-B048-85BDC9FD1C3A}</a:tableStyleId>
               </a:tblPr>
               <a:tblGrid>
                 <a:gridCol w="3291840"/>
@@ -5776,7 +5776,7 @@
           <a:graphicData uri="http://schemas.openxmlformats.org/drawingml/2006/table">
             <a:tbl>
               <a:tblPr>
-                <a:tableStyleId>{2D5ABB26-0587-4C30-8999-92F81FD0307C}</a:tableStyleId>
+                <a:tableStyleId>{5C22544A-7EE6-4342-B048-85BDC9FD1C3A}</a:tableStyleId>
               </a:tblPr>
               <a:tblGrid>
                 <a:gridCol w="3291840"/>
@@ -7207,7 +7207,7 @@
           <a:graphicData uri="http://schemas.openxmlformats.org/drawingml/2006/table">
             <a:tbl>
               <a:tblPr>
-                <a:tableStyleId>{2D5ABB26-0587-4C30-8999-92F81FD0307C}</a:tableStyleId>
+                <a:tableStyleId>{5C22544A-7EE6-4342-B048-85BDC9FD1C3A}</a:tableStyleId>
               </a:tblPr>
               <a:tblGrid>
                 <a:gridCol w="3291840"/>
@@ -8954,7 +8954,7 @@
           <a:graphicData uri="http://schemas.openxmlformats.org/drawingml/2006/table">
             <a:tbl>
               <a:tblPr>
-                <a:tableStyleId>{2D5ABB26-0587-4C30-8999-92F81FD0307C}</a:tableStyleId>
+                <a:tableStyleId>{5C22544A-7EE6-4342-B048-85BDC9FD1C3A}</a:tableStyleId>
               </a:tblPr>
               <a:tblGrid>
                 <a:gridCol w="3291840"/>
@@ -10247,7 +10247,7 @@
           <a:graphicData uri="http://schemas.openxmlformats.org/drawingml/2006/table">
             <a:tbl>
               <a:tblPr>
-                <a:tableStyleId>{2D5ABB26-0587-4C30-8999-92F81FD0307C}</a:tableStyleId>
+                <a:tableStyleId>{5C22544A-7EE6-4342-B048-85BDC9FD1C3A}</a:tableStyleId>
               </a:tblPr>
               <a:tblGrid>
                 <a:gridCol w="3291840"/>
@@ -11496,7 +11496,7 @@
           <a:graphicData uri="http://schemas.openxmlformats.org/drawingml/2006/table">
             <a:tbl>
               <a:tblPr>
-                <a:tableStyleId>{2D5ABB26-0587-4C30-8999-92F81FD0307C}</a:tableStyleId>
+                <a:tableStyleId>{5C22544A-7EE6-4342-B048-85BDC9FD1C3A}</a:tableStyleId>
               </a:tblPr>
               <a:tblGrid>
                 <a:gridCol w="3291840"/>
@@ -13016,7 +13016,7 @@
           <a:graphicData uri="http://schemas.openxmlformats.org/drawingml/2006/table">
             <a:tbl>
               <a:tblPr>
-                <a:tableStyleId>{2D5ABB26-0587-4C30-8999-92F81FD0307C}</a:tableStyleId>
+                <a:tableStyleId>{5C22544A-7EE6-4342-B048-85BDC9FD1C3A}</a:tableStyleId>
               </a:tblPr>
               <a:tblGrid>
                 <a:gridCol w="3291840"/>
@@ -14447,7 +14447,7 @@
           <a:graphicData uri="http://schemas.openxmlformats.org/drawingml/2006/table">
             <a:tbl>
               <a:tblPr>
-                <a:tableStyleId>{2D5ABB26-0587-4C30-8999-92F81FD0307C}</a:tableStyleId>
+                <a:tableStyleId>{5C22544A-7EE6-4342-B048-85BDC9FD1C3A}</a:tableStyleId>
               </a:tblPr>
               <a:tblGrid>
                 <a:gridCol w="3291840"/>
@@ -16194,7 +16194,7 @@
           <a:graphicData uri="http://schemas.openxmlformats.org/drawingml/2006/table">
             <a:tbl>
               <a:tblPr>
-                <a:tableStyleId>{2D5ABB26-0587-4C30-8999-92F81FD0307C}</a:tableStyleId>
+                <a:tableStyleId>{5C22544A-7EE6-4342-B048-85BDC9FD1C3A}</a:tableStyleId>
               </a:tblPr>
               <a:tblGrid>
                 <a:gridCol w="3291840"/>
@@ -17261,7 +17261,7 @@
           <a:graphicData uri="http://schemas.openxmlformats.org/drawingml/2006/table">
             <a:tbl>
               <a:tblPr>
-                <a:tableStyleId>{2D5ABB26-0587-4C30-8999-92F81FD0307C}</a:tableStyleId>
+                <a:tableStyleId>{5C22544A-7EE6-4342-B048-85BDC9FD1C3A}</a:tableStyleId>
               </a:tblPr>
               <a:tblGrid>
                 <a:gridCol w="3291840"/>
@@ -18554,7 +18554,7 @@
           <a:graphicData uri="http://schemas.openxmlformats.org/drawingml/2006/table">
             <a:tbl>
               <a:tblPr>
-                <a:tableStyleId>{2D5ABB26-0587-4C30-8999-92F81FD0307C}</a:tableStyleId>
+                <a:tableStyleId>{5C22544A-7EE6-4342-B048-85BDC9FD1C3A}</a:tableStyleId>
               </a:tblPr>
               <a:tblGrid>
                 <a:gridCol w="3291840"/>
